--- a/docs/高校生へのメッセージ.pptx
+++ b/docs/高校生へのメッセージ.pptx
@@ -251,7 +251,7 @@
           <a:p>
             <a:fld id="{B2DE2CB9-AE8C-42A2-B14E-7E07BA321FD7}" type="datetimeFigureOut">
               <a:rPr lang="en-US" smtClean="0"/>
-              <a:t>7/22/2025</a:t>
+              <a:t>7/28/2026</a:t>
             </a:fld>
             <a:endParaRPr lang="en-US"/>
           </a:p>
@@ -10091,14 +10091,14 @@
           <p:nvPr>
             <p:extLst>
               <p:ext uri="{D42A27DB-BD31-4B8C-83A1-F6EECF244321}">
-                <p14:modId xmlns:p14="http://schemas.microsoft.com/office/powerpoint/2010/main" val="3586075061"/>
+                <p14:modId xmlns:p14="http://schemas.microsoft.com/office/powerpoint/2010/main" val="563410162"/>
               </p:ext>
             </p:extLst>
           </p:nvPr>
         </p:nvGraphicFramePr>
         <p:xfrm>
-          <a:off x="2069291" y="1259137"/>
-          <a:ext cx="5491491" cy="2625225"/>
+          <a:off x="1828801" y="1259137"/>
+          <a:ext cx="5636028" cy="2625225"/>
         </p:xfrm>
         <a:graphic>
           <a:graphicData uri="http://schemas.openxmlformats.org/drawingml/2006/table">
@@ -10107,21 +10107,21 @@
                 <a:tableStyleId>{616DA210-FB5B-4158-B5E0-FEB733F419BA}</a:tableStyleId>
               </a:tblPr>
               <a:tblGrid>
-                <a:gridCol w="923900">
+                <a:gridCol w="978985">
                   <a:extLst>
                     <a:ext uri="{9D8B030D-6E8A-4147-A177-3AD203B41FA5}">
                       <a16:colId xmlns:a16="http://schemas.microsoft.com/office/drawing/2014/main" val="20000"/>
                     </a:ext>
                   </a:extLst>
                 </a:gridCol>
-                <a:gridCol w="1701050">
+                <a:gridCol w="1802471">
                   <a:extLst>
                     <a:ext uri="{9D8B030D-6E8A-4147-A177-3AD203B41FA5}">
                       <a16:colId xmlns:a16="http://schemas.microsoft.com/office/drawing/2014/main" val="20001"/>
                     </a:ext>
                   </a:extLst>
                 </a:gridCol>
-                <a:gridCol w="2866541">
+                <a:gridCol w="2854572">
                   <a:extLst>
                     <a:ext uri="{9D8B030D-6E8A-4147-A177-3AD203B41FA5}">
                       <a16:colId xmlns:a16="http://schemas.microsoft.com/office/drawing/2014/main" val="20002"/>
@@ -10504,6 +10504,10 @@
                         </a:spcAft>
                         <a:buNone/>
                       </a:pPr>
+                      <a:r>
+                        <a:rPr lang="ja-JP" altLang="en-US" sz="1600" dirty="0"/>
+                        <a:t>＋３年</a:t>
+                      </a:r>
                       <a:endParaRPr sz="1600" dirty="0"/>
                     </a:p>
                   </a:txBody>

--- a/docs/高校生へのメッセージ.pptx
+++ b/docs/高校生へのメッセージ.pptx
@@ -251,7 +251,7 @@
           <a:p>
             <a:fld id="{B2DE2CB9-AE8C-42A2-B14E-7E07BA321FD7}" type="datetimeFigureOut">
               <a:rPr lang="en-US" smtClean="0"/>
-              <a:t>7/28/2026</a:t>
+              <a:t>8/1/2026</a:t>
             </a:fld>
             <a:endParaRPr lang="en-US"/>
           </a:p>
@@ -9192,7 +9192,7 @@
         </p:spPr>
         <p:txBody>
           <a:bodyPr spcFirstLastPara="1" vert="horz" wrap="square" lIns="91425" tIns="91425" rIns="91425" bIns="91425" rtlCol="0" anchor="b" anchorCtr="0">
-            <a:normAutofit/>
+            <a:normAutofit fontScale="90000"/>
           </a:bodyPr>
           <a:lstStyle/>
           <a:p>
@@ -9206,7 +9206,7 @@
             <a:pPr lvl="0"/>
             <a:r>
               <a:rPr lang="ja-JP" altLang="en-US" dirty="0"/>
-              <a:t>シミュレーション</a:t>
+              <a:t>コンピュータプログラミング</a:t>
             </a:r>
           </a:p>
         </p:txBody>
@@ -9928,7 +9928,7 @@
             </a:r>
             <a:r>
               <a:rPr lang="ja-JP" altLang="en-US" dirty="0"/>
-              <a:t>できたことだけ，ノートに書く人が多いが，肝心な情報量ゼロ．</a:t>
+              <a:t>できたことを書く習慣の人が多いが，肝心な情報量がゼロ．</a:t>
             </a:r>
           </a:p>
           <a:p>
